--- a/decks/geog-asia-china/geog-asia-china_ch5_rural-urban.pptx
+++ b/decks/geog-asia-china/geog-asia-china_ch5_rural-urban.pptx
@@ -126,30 +126,30 @@
   <p:extLst>
     <p:ext uri="{521415D9-36F7-43E2-AB2F-B90AF26B5E84}">
       <p14:sectionLst xmlns:p14="http://schemas.microsoft.com/office/powerpoint/2010/main">
-        <p14:section name="Opening" id="{f99f0da8-4a8b-b46e-2a89-5933abefe2db}">
+        <p14:section name="Opening" id="{f2230811-4943-3ebb-6dce-a43171902824}">
           <p14:sldIdLst>
             <p14:sldId id="256"/>
           </p14:sldIdLst>
         </p14:section>
-        <p14:section name="Gate" id="{43a288ed-a156-78c1-8b37-0aa8b6a92e5c}">
+        <p14:section name="Gate" id="{5e57fc9b-6716-b7d8-f300-7ce7380171e3}">
           <p14:sldIdLst>
             <p14:sldId id="257"/>
             <p14:sldId id="258"/>
           </p14:sldIdLst>
         </p14:section>
-        <p14:section name="Pre-teach" id="{09235fc0-ac16-1df6-e130-7ba89678ddab}">
+        <p14:section name="Pre-teach" id="{9178f08a-5399-481c-4b2d-09c77111eb36}">
           <p14:sldIdLst>
             <p14:sldId id="259"/>
             <p14:sldId id="260"/>
           </p14:sldIdLst>
         </p14:section>
-        <p14:section name="Read-along" id="{f5e1322d-3a3f-9909-f6eb-2342b2f6e687}">
+        <p14:section name="Read-along" id="{6c0511dc-6ec7-0604-833d-56b845be976c}">
           <p14:sldIdLst>
             <p14:sldId id="261"/>
             <p14:sldId id="262"/>
           </p14:sldIdLst>
         </p14:section>
-        <p14:section name="Teach" id="{2cf4b837-5d19-9e72-143c-e29ddd3af143}">
+        <p14:section name="Teach" id="{42295d08-94e2-3665-cc3c-1ea5660f8806}">
           <p14:sldIdLst>
             <p14:sldId id="263"/>
             <p14:sldId id="264"/>
@@ -158,7 +158,7 @@
             <p14:sldId id="267"/>
           </p14:sldIdLst>
         </p14:section>
-        <p14:section name="Routes" id="{ae69366d-dc6b-9124-5842-32acae559f25}">
+        <p14:section name="Routes" id="{f5a2324f-cf4d-ec14-073c-3f9359e50968}">
           <p14:sldIdLst>
             <p14:sldId id="268"/>
             <p14:sldId id="269"/>
@@ -166,12 +166,12 @@
             <p14:sldId id="271"/>
           </p14:sldIdLst>
         </p14:section>
-        <p14:section name="Close" id="{6949ba71-b0d0-1d96-c2cb-6b4da83dff3f}">
+        <p14:section name="Close" id="{c057d15e-fe3a-4f72-410f-bd63876c122e}">
           <p14:sldIdLst>
             <p14:sldId id="272"/>
           </p14:sldIdLst>
         </p14:section>
-        <p14:section name="Answers" id="{50f65188-bf04-1545-02a7-8fccc0a57da1}">
+        <p14:section name="Answers" id="{bd5955cc-9543-1b43-7bae-c0a6c16c7187}">
           <p14:sldIdLst>
             <p14:sldId id="273"/>
             <p14:sldId id="274"/>
